--- a/docs/2027년_사무직원_채용계획안_B_중앙워터마크.pptx
+++ b/docs/2027년_사무직원_채용계획안_B_중앙워터마크.pptx
@@ -1962,7 +1962,7 @@
         </p:nvPicPr>
         <p:blipFill>
           <a:blip r:embed="rId1">
-            <a:alphaModFix amt="11000"/>
+            <a:alphaModFix amt="7000"/>
           </a:blip>
           <a:stretch>
             <a:fillRect/>
@@ -1970,8 +1970,8 @@
         </p:blipFill>
         <p:spPr>
           <a:xfrm>
-            <a:off x="3383280" y="731520"/>
-            <a:ext cx="5394960" cy="5394960"/>
+            <a:off x="4023360" y="1371600"/>
+            <a:ext cx="4114800" cy="4114800"/>
           </a:xfrm>
           <a:prstGeom prst="rect">
             <a:avLst/>

--- a/docs/2027년_사무직원_채용계획안_B_중앙워터마크.pptx
+++ b/docs/2027년_사무직원_채용계획안_B_중앙워터마크.pptx
@@ -1962,7 +1962,7 @@
         </p:nvPicPr>
         <p:blipFill>
           <a:blip r:embed="rId1">
-            <a:alphaModFix amt="7000"/>
+            <a:alphaModFix amt="4000"/>
           </a:blip>
           <a:stretch>
             <a:fillRect/>

--- a/docs/2027년_사무직원_채용계획안_B_중앙워터마크.pptx
+++ b/docs/2027년_사무직원_채용계획안_B_중앙워터마크.pptx
@@ -2469,9 +2469,33 @@
           <a:chExt cx="0" cy="0"/>
         </a:xfrm>
       </p:grpSpPr>
-      <p:sp>
-        <p:nvSpPr>
-          <p:cNvPr id="2" name="Text 0"/>
+      <p:pic>
+        <p:nvPicPr>
+          <p:cNvPr id="2" name="Image 0" descr="정석항공과학고등학교 교표">    </p:cNvPr>
+          <p:cNvPicPr>
+            <a:picLocks noChangeAspect="1"/>
+          </p:cNvPicPr>
+          <p:nvPr/>
+        </p:nvPicPr>
+        <p:blipFill>
+          <a:blip r:embed="rId1"/>
+          <a:stretch>
+            <a:fillRect/>
+          </a:stretch>
+        </p:blipFill>
+        <p:spPr>
+          <a:xfrm>
+            <a:off x="10753344" y="384048"/>
+            <a:ext cx="841248" cy="360274"/>
+          </a:xfrm>
+          <a:prstGeom prst="rect">
+            <a:avLst/>
+          </a:prstGeom>
+        </p:spPr>
+      </p:pic>
+      <p:sp>
+        <p:nvSpPr>
+          <p:cNvPr id="3" name="Text 0"/>
           <p:cNvSpPr txBox="1"/>
           <p:nvPr/>
         </p:nvSpPr>
@@ -2510,7 +2534,7 @@
       </p:sp>
       <p:sp>
         <p:nvSpPr>
-          <p:cNvPr id="3" name="Text 1"/>
+          <p:cNvPr id="4" name="Text 1"/>
           <p:cNvSpPr txBox="1"/>
           <p:nvPr/>
         </p:nvSpPr>
@@ -2549,7 +2573,7 @@
       </p:sp>
       <p:sp>
         <p:nvSpPr>
-          <p:cNvPr id="4" name="Shape 2"/>
+          <p:cNvPr id="5" name="Shape 2"/>
           <p:cNvSpPr/>
           <p:nvPr/>
         </p:nvSpPr>
@@ -2583,7 +2607,7 @@
       </p:sp>
       <p:sp>
         <p:nvSpPr>
-          <p:cNvPr id="5" name="Shape 3"/>
+          <p:cNvPr id="6" name="Shape 3"/>
           <p:cNvSpPr/>
           <p:nvPr/>
         </p:nvSpPr>
@@ -2603,7 +2627,7 @@
       </p:sp>
       <p:sp>
         <p:nvSpPr>
-          <p:cNvPr id="6" name="Text 4"/>
+          <p:cNvPr id="7" name="Text 4"/>
           <p:cNvSpPr txBox="1"/>
           <p:nvPr/>
         </p:nvSpPr>
@@ -2642,7 +2666,7 @@
       </p:sp>
       <p:sp>
         <p:nvSpPr>
-          <p:cNvPr id="7" name="Text 5"/>
+          <p:cNvPr id="8" name="Text 5"/>
           <p:cNvSpPr txBox="1"/>
           <p:nvPr/>
         </p:nvSpPr>
@@ -2681,7 +2705,7 @@
       </p:sp>
       <p:sp>
         <p:nvSpPr>
-          <p:cNvPr id="8" name="Text 6"/>
+          <p:cNvPr id="9" name="Text 6"/>
           <p:cNvSpPr txBox="1"/>
           <p:nvPr/>
         </p:nvSpPr>
@@ -2751,7 +2775,7 @@
       </p:sp>
       <p:sp>
         <p:nvSpPr>
-          <p:cNvPr id="9" name="Shape 7"/>
+          <p:cNvPr id="10" name="Shape 7"/>
           <p:cNvSpPr/>
           <p:nvPr/>
         </p:nvSpPr>
@@ -2785,7 +2809,7 @@
       </p:sp>
       <p:sp>
         <p:nvSpPr>
-          <p:cNvPr id="10" name="Shape 8"/>
+          <p:cNvPr id="11" name="Shape 8"/>
           <p:cNvSpPr/>
           <p:nvPr/>
         </p:nvSpPr>
@@ -2805,7 +2829,7 @@
       </p:sp>
       <p:sp>
         <p:nvSpPr>
-          <p:cNvPr id="11" name="Text 9"/>
+          <p:cNvPr id="12" name="Text 9"/>
           <p:cNvSpPr txBox="1"/>
           <p:nvPr/>
         </p:nvSpPr>
@@ -2844,7 +2868,7 @@
       </p:sp>
       <p:sp>
         <p:nvSpPr>
-          <p:cNvPr id="12" name="Text 10"/>
+          <p:cNvPr id="13" name="Text 10"/>
           <p:cNvSpPr txBox="1"/>
           <p:nvPr/>
         </p:nvSpPr>
@@ -2883,7 +2907,7 @@
       </p:sp>
       <p:sp>
         <p:nvSpPr>
-          <p:cNvPr id="13" name="Text 11"/>
+          <p:cNvPr id="14" name="Text 11"/>
           <p:cNvSpPr txBox="1"/>
           <p:nvPr/>
         </p:nvSpPr>
@@ -2929,7 +2953,7 @@
       </p:sp>
       <p:sp>
         <p:nvSpPr>
-          <p:cNvPr id="14" name="Shape 12"/>
+          <p:cNvPr id="15" name="Shape 12"/>
           <p:cNvSpPr/>
           <p:nvPr/>
         </p:nvSpPr>
@@ -2963,7 +2987,7 @@
       </p:sp>
       <p:sp>
         <p:nvSpPr>
-          <p:cNvPr id="15" name="Shape 13"/>
+          <p:cNvPr id="16" name="Shape 13"/>
           <p:cNvSpPr/>
           <p:nvPr/>
         </p:nvSpPr>
@@ -2983,7 +3007,7 @@
       </p:sp>
       <p:sp>
         <p:nvSpPr>
-          <p:cNvPr id="16" name="Text 14"/>
+          <p:cNvPr id="17" name="Text 14"/>
           <p:cNvSpPr txBox="1"/>
           <p:nvPr/>
         </p:nvSpPr>
@@ -3022,7 +3046,7 @@
       </p:sp>
       <p:sp>
         <p:nvSpPr>
-          <p:cNvPr id="17" name="Text 15"/>
+          <p:cNvPr id="18" name="Text 15"/>
           <p:cNvSpPr txBox="1"/>
           <p:nvPr/>
         </p:nvSpPr>
@@ -3061,7 +3085,7 @@
       </p:sp>
       <p:sp>
         <p:nvSpPr>
-          <p:cNvPr id="18" name="Text 16"/>
+          <p:cNvPr id="19" name="Text 16"/>
           <p:cNvSpPr txBox="1"/>
           <p:nvPr/>
         </p:nvSpPr>
@@ -3107,7 +3131,7 @@
       </p:sp>
       <p:sp>
         <p:nvSpPr>
-          <p:cNvPr id="19" name="Shape 17"/>
+          <p:cNvPr id="20" name="Shape 17"/>
           <p:cNvSpPr/>
           <p:nvPr/>
         </p:nvSpPr>
@@ -3141,7 +3165,7 @@
       </p:sp>
       <p:sp>
         <p:nvSpPr>
-          <p:cNvPr id="20" name="Text 18"/>
+          <p:cNvPr id="21" name="Text 18"/>
           <p:cNvSpPr txBox="1"/>
           <p:nvPr/>
         </p:nvSpPr>
@@ -3210,29 +3234,33 @@
           <a:chExt cx="0" cy="0"/>
         </a:xfrm>
       </p:grpSpPr>
-      <p:sp>
-        <p:nvSpPr>
-          <p:cNvPr id="2" name="Shape 0"/>
-          <p:cNvSpPr/>
-          <p:nvPr/>
-        </p:nvSpPr>
-        <p:spPr>
-          <a:xfrm>
-            <a:off x="9692640" y="-2743200"/>
-            <a:ext cx="4754880" cy="4754880"/>
-          </a:xfrm>
-          <a:prstGeom prst="ellipse">
-            <a:avLst/>
-          </a:prstGeom>
-          <a:solidFill>
-            <a:srgbClr val="141B44"/>
-          </a:solidFill>
-          <a:ln/>
-        </p:spPr>
-      </p:sp>
-      <p:sp>
-        <p:nvSpPr>
-          <p:cNvPr id="3" name="Text 1"/>
+      <p:pic>
+        <p:nvPicPr>
+          <p:cNvPr id="2" name="Image 0" descr="정석항공과학고등학교 교표">    </p:cNvPr>
+          <p:cNvPicPr>
+            <a:picLocks noChangeAspect="1"/>
+          </p:cNvPicPr>
+          <p:nvPr/>
+        </p:nvPicPr>
+        <p:blipFill>
+          <a:blip r:embed="rId1"/>
+          <a:stretch>
+            <a:fillRect/>
+          </a:stretch>
+        </p:blipFill>
+        <p:spPr>
+          <a:xfrm>
+            <a:off x="10753344" y="384048"/>
+            <a:ext cx="841248" cy="360274"/>
+          </a:xfrm>
+          <a:prstGeom prst="rect">
+            <a:avLst/>
+          </a:prstGeom>
+        </p:spPr>
+      </p:pic>
+      <p:sp>
+        <p:nvSpPr>
+          <p:cNvPr id="3" name="Text 0"/>
           <p:cNvSpPr txBox="1"/>
           <p:nvPr/>
         </p:nvSpPr>
@@ -3271,7 +3299,7 @@
       </p:sp>
       <p:sp>
         <p:nvSpPr>
-          <p:cNvPr id="4" name="Text 2"/>
+          <p:cNvPr id="4" name="Text 1"/>
           <p:cNvSpPr txBox="1"/>
           <p:nvPr/>
         </p:nvSpPr>
@@ -3310,7 +3338,7 @@
       </p:sp>
       <p:sp>
         <p:nvSpPr>
-          <p:cNvPr id="5" name="Shape 3"/>
+          <p:cNvPr id="5" name="Shape 2"/>
           <p:cNvSpPr/>
           <p:nvPr/>
         </p:nvSpPr>
@@ -3337,7 +3365,7 @@
       </p:sp>
       <p:sp>
         <p:nvSpPr>
-          <p:cNvPr id="6" name="Text 4"/>
+          <p:cNvPr id="6" name="Text 3"/>
           <p:cNvSpPr txBox="1"/>
           <p:nvPr/>
         </p:nvSpPr>
@@ -3376,7 +3404,7 @@
       </p:sp>
       <p:sp>
         <p:nvSpPr>
-          <p:cNvPr id="7" name="Text 5"/>
+          <p:cNvPr id="7" name="Text 4"/>
           <p:cNvSpPr txBox="1"/>
           <p:nvPr/>
         </p:nvSpPr>
@@ -3415,7 +3443,7 @@
       </p:sp>
       <p:sp>
         <p:nvSpPr>
-          <p:cNvPr id="8" name="Text 6"/>
+          <p:cNvPr id="8" name="Text 5"/>
           <p:cNvSpPr txBox="1"/>
           <p:nvPr/>
         </p:nvSpPr>
@@ -3457,7 +3485,7 @@
       </p:sp>
       <p:sp>
         <p:nvSpPr>
-          <p:cNvPr id="9" name="Shape 7"/>
+          <p:cNvPr id="9" name="Shape 6"/>
           <p:cNvSpPr/>
           <p:nvPr/>
         </p:nvSpPr>
@@ -3484,7 +3512,7 @@
       </p:sp>
       <p:sp>
         <p:nvSpPr>
-          <p:cNvPr id="10" name="Text 8"/>
+          <p:cNvPr id="10" name="Text 7"/>
           <p:cNvSpPr txBox="1"/>
           <p:nvPr/>
         </p:nvSpPr>
@@ -3523,7 +3551,7 @@
       </p:sp>
       <p:sp>
         <p:nvSpPr>
-          <p:cNvPr id="11" name="Text 9"/>
+          <p:cNvPr id="11" name="Text 8"/>
           <p:cNvSpPr txBox="1"/>
           <p:nvPr/>
         </p:nvSpPr>
@@ -3562,7 +3590,7 @@
       </p:sp>
       <p:sp>
         <p:nvSpPr>
-          <p:cNvPr id="12" name="Text 10"/>
+          <p:cNvPr id="12" name="Text 9"/>
           <p:cNvSpPr txBox="1"/>
           <p:nvPr/>
         </p:nvSpPr>
@@ -3604,7 +3632,7 @@
       </p:sp>
       <p:sp>
         <p:nvSpPr>
-          <p:cNvPr id="13" name="Shape 11"/>
+          <p:cNvPr id="13" name="Shape 10"/>
           <p:cNvSpPr/>
           <p:nvPr/>
         </p:nvSpPr>
@@ -3631,7 +3659,7 @@
       </p:sp>
       <p:sp>
         <p:nvSpPr>
-          <p:cNvPr id="14" name="Text 12"/>
+          <p:cNvPr id="14" name="Text 11"/>
           <p:cNvSpPr txBox="1"/>
           <p:nvPr/>
         </p:nvSpPr>
@@ -3670,7 +3698,7 @@
       </p:sp>
       <p:sp>
         <p:nvSpPr>
-          <p:cNvPr id="15" name="Text 13"/>
+          <p:cNvPr id="15" name="Text 12"/>
           <p:cNvSpPr txBox="1"/>
           <p:nvPr/>
         </p:nvSpPr>
@@ -3709,7 +3737,7 @@
       </p:sp>
       <p:sp>
         <p:nvSpPr>
-          <p:cNvPr id="16" name="Text 14"/>
+          <p:cNvPr id="16" name="Text 13"/>
           <p:cNvSpPr txBox="1"/>
           <p:nvPr/>
         </p:nvSpPr>
@@ -3751,7 +3779,7 @@
       </p:sp>
       <p:sp>
         <p:nvSpPr>
-          <p:cNvPr id="17" name="Shape 15"/>
+          <p:cNvPr id="17" name="Shape 14"/>
           <p:cNvSpPr/>
           <p:nvPr/>
         </p:nvSpPr>
@@ -3778,7 +3806,7 @@
       </p:sp>
       <p:sp>
         <p:nvSpPr>
-          <p:cNvPr id="18" name="Text 16"/>
+          <p:cNvPr id="18" name="Text 15"/>
           <p:cNvSpPr txBox="1"/>
           <p:nvPr/>
         </p:nvSpPr>
@@ -3817,7 +3845,7 @@
       </p:sp>
       <p:sp>
         <p:nvSpPr>
-          <p:cNvPr id="19" name="Text 17"/>
+          <p:cNvPr id="19" name="Text 16"/>
           <p:cNvSpPr txBox="1"/>
           <p:nvPr/>
         </p:nvSpPr>
@@ -3856,7 +3884,7 @@
       </p:sp>
       <p:sp>
         <p:nvSpPr>
-          <p:cNvPr id="20" name="Text 18"/>
+          <p:cNvPr id="20" name="Text 17"/>
           <p:cNvSpPr txBox="1"/>
           <p:nvPr/>
         </p:nvSpPr>
@@ -3898,7 +3926,7 @@
       </p:sp>
       <p:sp>
         <p:nvSpPr>
-          <p:cNvPr id="21" name="Text 19"/>
+          <p:cNvPr id="21" name="Text 18"/>
           <p:cNvSpPr txBox="1"/>
           <p:nvPr/>
         </p:nvSpPr>
@@ -3937,7 +3965,7 @@
       </p:sp>
       <p:sp>
         <p:nvSpPr>
-          <p:cNvPr id="22" name="Shape 20"/>
+          <p:cNvPr id="22" name="Shape 19"/>
           <p:cNvSpPr/>
           <p:nvPr/>
         </p:nvSpPr>
@@ -3957,7 +3985,7 @@
       </p:sp>
       <p:sp>
         <p:nvSpPr>
-          <p:cNvPr id="23" name="Text 21"/>
+          <p:cNvPr id="23" name="Text 20"/>
           <p:cNvSpPr txBox="1"/>
           <p:nvPr/>
         </p:nvSpPr>
@@ -3996,7 +4024,7 @@
       </p:sp>
       <p:sp>
         <p:nvSpPr>
-          <p:cNvPr id="24" name="Text 22"/>
+          <p:cNvPr id="24" name="Text 21"/>
           <p:cNvSpPr txBox="1"/>
           <p:nvPr/>
         </p:nvSpPr>
@@ -4038,7 +4066,7 @@
       </p:sp>
       <p:sp>
         <p:nvSpPr>
-          <p:cNvPr id="25" name="Shape 23"/>
+          <p:cNvPr id="25" name="Shape 22"/>
           <p:cNvSpPr/>
           <p:nvPr/>
         </p:nvSpPr>
@@ -4058,7 +4086,7 @@
       </p:sp>
       <p:sp>
         <p:nvSpPr>
-          <p:cNvPr id="26" name="Text 24"/>
+          <p:cNvPr id="26" name="Text 23"/>
           <p:cNvSpPr txBox="1"/>
           <p:nvPr/>
         </p:nvSpPr>
@@ -4097,7 +4125,7 @@
       </p:sp>
       <p:sp>
         <p:nvSpPr>
-          <p:cNvPr id="27" name="Text 25"/>
+          <p:cNvPr id="27" name="Text 24"/>
           <p:cNvSpPr txBox="1"/>
           <p:nvPr/>
         </p:nvSpPr>
@@ -4139,7 +4167,7 @@
       </p:sp>
       <p:sp>
         <p:nvSpPr>
-          <p:cNvPr id="28" name="Shape 26"/>
+          <p:cNvPr id="28" name="Shape 25"/>
           <p:cNvSpPr/>
           <p:nvPr/>
         </p:nvSpPr>
@@ -4159,7 +4187,7 @@
       </p:sp>
       <p:sp>
         <p:nvSpPr>
-          <p:cNvPr id="29" name="Text 27"/>
+          <p:cNvPr id="29" name="Text 26"/>
           <p:cNvSpPr txBox="1"/>
           <p:nvPr/>
         </p:nvSpPr>
@@ -4198,7 +4226,7 @@
       </p:sp>
       <p:sp>
         <p:nvSpPr>
-          <p:cNvPr id="30" name="Text 28"/>
+          <p:cNvPr id="30" name="Text 27"/>
           <p:cNvSpPr txBox="1"/>
           <p:nvPr/>
         </p:nvSpPr>
@@ -4240,7 +4268,7 @@
       </p:sp>
       <p:sp>
         <p:nvSpPr>
-          <p:cNvPr id="31" name="Shape 29"/>
+          <p:cNvPr id="31" name="Shape 28"/>
           <p:cNvSpPr/>
           <p:nvPr/>
         </p:nvSpPr>
@@ -4260,7 +4288,7 @@
       </p:sp>
       <p:sp>
         <p:nvSpPr>
-          <p:cNvPr id="32" name="Text 30"/>
+          <p:cNvPr id="32" name="Text 29"/>
           <p:cNvSpPr txBox="1"/>
           <p:nvPr/>
         </p:nvSpPr>
@@ -4299,7 +4327,7 @@
       </p:sp>
       <p:sp>
         <p:nvSpPr>
-          <p:cNvPr id="33" name="Text 31"/>
+          <p:cNvPr id="33" name="Text 30"/>
           <p:cNvSpPr txBox="1"/>
           <p:nvPr/>
         </p:nvSpPr>
@@ -4371,9 +4399,33 @@
           <a:chExt cx="0" cy="0"/>
         </a:xfrm>
       </p:grpSpPr>
-      <p:sp>
-        <p:nvSpPr>
-          <p:cNvPr id="2" name="Text 0"/>
+      <p:pic>
+        <p:nvPicPr>
+          <p:cNvPr id="2" name="Image 0" descr="정석항공과학고등학교 교표">    </p:cNvPr>
+          <p:cNvPicPr>
+            <a:picLocks noChangeAspect="1"/>
+          </p:cNvPicPr>
+          <p:nvPr/>
+        </p:nvPicPr>
+        <p:blipFill>
+          <a:blip r:embed="rId1"/>
+          <a:stretch>
+            <a:fillRect/>
+          </a:stretch>
+        </p:blipFill>
+        <p:spPr>
+          <a:xfrm>
+            <a:off x="10753344" y="384048"/>
+            <a:ext cx="841248" cy="360274"/>
+          </a:xfrm>
+          <a:prstGeom prst="rect">
+            <a:avLst/>
+          </a:prstGeom>
+        </p:spPr>
+      </p:pic>
+      <p:sp>
+        <p:nvSpPr>
+          <p:cNvPr id="3" name="Text 0"/>
           <p:cNvSpPr txBox="1"/>
           <p:nvPr/>
         </p:nvSpPr>
@@ -4412,7 +4464,7 @@
       </p:sp>
       <p:sp>
         <p:nvSpPr>
-          <p:cNvPr id="3" name="Text 1"/>
+          <p:cNvPr id="4" name="Text 1"/>
           <p:cNvSpPr txBox="1"/>
           <p:nvPr/>
         </p:nvSpPr>
@@ -4451,7 +4503,7 @@
       </p:sp>
       <p:sp>
         <p:nvSpPr>
-          <p:cNvPr id="4" name="Shape 2"/>
+          <p:cNvPr id="5" name="Shape 2"/>
           <p:cNvSpPr/>
           <p:nvPr/>
         </p:nvSpPr>
@@ -4485,7 +4537,7 @@
       </p:sp>
       <p:sp>
         <p:nvSpPr>
-          <p:cNvPr id="5" name="Text 3"/>
+          <p:cNvPr id="6" name="Text 3"/>
           <p:cNvSpPr txBox="1"/>
           <p:nvPr/>
         </p:nvSpPr>
@@ -4524,7 +4576,7 @@
       </p:sp>
       <p:sp>
         <p:nvSpPr>
-          <p:cNvPr id="6" name="Text 4"/>
+          <p:cNvPr id="7" name="Text 4"/>
           <p:cNvSpPr txBox="1"/>
           <p:nvPr/>
         </p:nvSpPr>
@@ -4563,7 +4615,7 @@
       </p:sp>
       <p:sp>
         <p:nvSpPr>
-          <p:cNvPr id="7" name="Shape 5"/>
+          <p:cNvPr id="8" name="Shape 5"/>
           <p:cNvSpPr/>
           <p:nvPr/>
         </p:nvSpPr>
@@ -4597,7 +4649,7 @@
       </p:sp>
       <p:sp>
         <p:nvSpPr>
-          <p:cNvPr id="8" name="Text 6"/>
+          <p:cNvPr id="9" name="Text 6"/>
           <p:cNvSpPr txBox="1"/>
           <p:nvPr/>
         </p:nvSpPr>
@@ -4636,7 +4688,7 @@
       </p:sp>
       <p:sp>
         <p:nvSpPr>
-          <p:cNvPr id="9" name="Text 7"/>
+          <p:cNvPr id="10" name="Text 7"/>
           <p:cNvSpPr txBox="1"/>
           <p:nvPr/>
         </p:nvSpPr>
@@ -4675,7 +4727,7 @@
       </p:sp>
       <p:sp>
         <p:nvSpPr>
-          <p:cNvPr id="10" name="Shape 8"/>
+          <p:cNvPr id="11" name="Shape 8"/>
           <p:cNvSpPr/>
           <p:nvPr/>
         </p:nvSpPr>
@@ -4709,7 +4761,7 @@
       </p:sp>
       <p:sp>
         <p:nvSpPr>
-          <p:cNvPr id="11" name="Text 9"/>
+          <p:cNvPr id="12" name="Text 9"/>
           <p:cNvSpPr txBox="1"/>
           <p:nvPr/>
         </p:nvSpPr>
@@ -4748,7 +4800,7 @@
       </p:sp>
       <p:sp>
         <p:nvSpPr>
-          <p:cNvPr id="12" name="Text 10"/>
+          <p:cNvPr id="13" name="Text 10"/>
           <p:cNvSpPr txBox="1"/>
           <p:nvPr/>
         </p:nvSpPr>
@@ -4787,7 +4839,7 @@
       </p:sp>
       <p:sp>
         <p:nvSpPr>
-          <p:cNvPr id="13" name="Shape 11"/>
+          <p:cNvPr id="14" name="Shape 11"/>
           <p:cNvSpPr/>
           <p:nvPr/>
         </p:nvSpPr>
@@ -4821,7 +4873,7 @@
       </p:sp>
       <p:sp>
         <p:nvSpPr>
-          <p:cNvPr id="14" name="Text 12"/>
+          <p:cNvPr id="15" name="Text 12"/>
           <p:cNvSpPr txBox="1"/>
           <p:nvPr/>
         </p:nvSpPr>
@@ -4860,7 +4912,7 @@
       </p:sp>
       <p:sp>
         <p:nvSpPr>
-          <p:cNvPr id="15" name="Text 13"/>
+          <p:cNvPr id="16" name="Text 13"/>
           <p:cNvSpPr txBox="1"/>
           <p:nvPr/>
         </p:nvSpPr>
@@ -4899,7 +4951,7 @@
       </p:sp>
       <p:sp>
         <p:nvSpPr>
-          <p:cNvPr id="16" name="Text 14"/>
+          <p:cNvPr id="17" name="Text 14"/>
           <p:cNvSpPr txBox="1"/>
           <p:nvPr/>
         </p:nvSpPr>
@@ -4961,7 +5013,7 @@
       </p:sp>
       <p:sp>
         <p:nvSpPr>
-          <p:cNvPr id="17" name="Shape 15"/>
+          <p:cNvPr id="18" name="Shape 15"/>
           <p:cNvSpPr/>
           <p:nvPr/>
         </p:nvSpPr>
@@ -4995,7 +5047,7 @@
       </p:sp>
       <p:sp>
         <p:nvSpPr>
-          <p:cNvPr id="18" name="Text 16"/>
+          <p:cNvPr id="19" name="Text 16"/>
           <p:cNvSpPr txBox="1"/>
           <p:nvPr/>
         </p:nvSpPr>
@@ -5034,7 +5086,7 @@
       </p:sp>
       <p:sp>
         <p:nvSpPr>
-          <p:cNvPr id="19" name="Text 17"/>
+          <p:cNvPr id="20" name="Text 17"/>
           <p:cNvSpPr txBox="1"/>
           <p:nvPr/>
         </p:nvSpPr>
@@ -5073,7 +5125,7 @@
       </p:sp>
       <p:sp>
         <p:nvSpPr>
-          <p:cNvPr id="20" name="Shape 18"/>
+          <p:cNvPr id="21" name="Shape 18"/>
           <p:cNvSpPr/>
           <p:nvPr/>
         </p:nvSpPr>
@@ -5107,7 +5159,7 @@
       </p:sp>
       <p:sp>
         <p:nvSpPr>
-          <p:cNvPr id="21" name="Text 19"/>
+          <p:cNvPr id="22" name="Text 19"/>
           <p:cNvSpPr txBox="1"/>
           <p:nvPr/>
         </p:nvSpPr>
@@ -5146,7 +5198,7 @@
       </p:sp>
       <p:sp>
         <p:nvSpPr>
-          <p:cNvPr id="22" name="Shape 20"/>
+          <p:cNvPr id="23" name="Shape 20"/>
           <p:cNvSpPr/>
           <p:nvPr/>
         </p:nvSpPr>
@@ -5166,7 +5218,7 @@
       </p:sp>
       <p:sp>
         <p:nvSpPr>
-          <p:cNvPr id="23" name="Text 21"/>
+          <p:cNvPr id="24" name="Text 21"/>
           <p:cNvSpPr txBox="1"/>
           <p:nvPr/>
         </p:nvSpPr>
@@ -5205,7 +5257,7 @@
       </p:sp>
       <p:sp>
         <p:nvSpPr>
-          <p:cNvPr id="24" name="Text 22"/>
+          <p:cNvPr id="25" name="Text 22"/>
           <p:cNvSpPr txBox="1"/>
           <p:nvPr/>
         </p:nvSpPr>
@@ -5247,7 +5299,7 @@
       </p:sp>
       <p:sp>
         <p:nvSpPr>
-          <p:cNvPr id="25" name="Shape 23"/>
+          <p:cNvPr id="26" name="Shape 23"/>
           <p:cNvSpPr/>
           <p:nvPr/>
         </p:nvSpPr>
@@ -5267,7 +5319,7 @@
       </p:sp>
       <p:sp>
         <p:nvSpPr>
-          <p:cNvPr id="26" name="Text 24"/>
+          <p:cNvPr id="27" name="Text 24"/>
           <p:cNvSpPr txBox="1"/>
           <p:nvPr/>
         </p:nvSpPr>
@@ -5306,7 +5358,7 @@
       </p:sp>
       <p:sp>
         <p:nvSpPr>
-          <p:cNvPr id="27" name="Text 25"/>
+          <p:cNvPr id="28" name="Text 25"/>
           <p:cNvSpPr txBox="1"/>
           <p:nvPr/>
         </p:nvSpPr>
@@ -5348,7 +5400,7 @@
       </p:sp>
       <p:sp>
         <p:nvSpPr>
-          <p:cNvPr id="28" name="Text 26"/>
+          <p:cNvPr id="29" name="Text 26"/>
           <p:cNvSpPr txBox="1"/>
           <p:nvPr/>
         </p:nvSpPr>
@@ -5417,9 +5469,33 @@
           <a:chExt cx="0" cy="0"/>
         </a:xfrm>
       </p:grpSpPr>
-      <p:sp>
-        <p:nvSpPr>
-          <p:cNvPr id="2" name="Text 0"/>
+      <p:pic>
+        <p:nvPicPr>
+          <p:cNvPr id="2" name="Image 0" descr="정석항공과학고등학교 교표">    </p:cNvPr>
+          <p:cNvPicPr>
+            <a:picLocks noChangeAspect="1"/>
+          </p:cNvPicPr>
+          <p:nvPr/>
+        </p:nvPicPr>
+        <p:blipFill>
+          <a:blip r:embed="rId1"/>
+          <a:stretch>
+            <a:fillRect/>
+          </a:stretch>
+        </p:blipFill>
+        <p:spPr>
+          <a:xfrm>
+            <a:off x="10753344" y="384048"/>
+            <a:ext cx="841248" cy="360274"/>
+          </a:xfrm>
+          <a:prstGeom prst="rect">
+            <a:avLst/>
+          </a:prstGeom>
+        </p:spPr>
+      </p:pic>
+      <p:sp>
+        <p:nvSpPr>
+          <p:cNvPr id="3" name="Text 0"/>
           <p:cNvSpPr txBox="1"/>
           <p:nvPr/>
         </p:nvSpPr>
@@ -5458,7 +5534,7 @@
       </p:sp>
       <p:sp>
         <p:nvSpPr>
-          <p:cNvPr id="3" name="Text 1"/>
+          <p:cNvPr id="4" name="Text 1"/>
           <p:cNvSpPr txBox="1"/>
           <p:nvPr/>
         </p:nvSpPr>
@@ -5497,7 +5573,7 @@
       </p:sp>
       <p:sp>
         <p:nvSpPr>
-          <p:cNvPr id="4" name="Text 2"/>
+          <p:cNvPr id="5" name="Text 2"/>
           <p:cNvSpPr txBox="1"/>
           <p:nvPr/>
         </p:nvSpPr>
@@ -8144,7 +8220,7 @@
       </p:graphicFrame>
       <p:sp>
         <p:nvSpPr>
-          <p:cNvPr id="6" name="Text 3"/>
+          <p:cNvPr id="7" name="Text 3"/>
           <p:cNvSpPr txBox="1"/>
           <p:nvPr/>
         </p:nvSpPr>
@@ -8183,7 +8259,7 @@
       </p:sp>
       <p:sp>
         <p:nvSpPr>
-          <p:cNvPr id="7" name="Shape 4"/>
+          <p:cNvPr id="8" name="Shape 4"/>
           <p:cNvSpPr/>
           <p:nvPr/>
         </p:nvSpPr>
@@ -8217,7 +8293,7 @@
       </p:sp>
       <p:sp>
         <p:nvSpPr>
-          <p:cNvPr id="8" name="Text 5"/>
+          <p:cNvPr id="9" name="Text 5"/>
           <p:cNvSpPr txBox="1"/>
           <p:nvPr/>
         </p:nvSpPr>
@@ -8256,7 +8332,7 @@
       </p:sp>
       <p:sp>
         <p:nvSpPr>
-          <p:cNvPr id="9" name="Text 6"/>
+          <p:cNvPr id="10" name="Text 6"/>
           <p:cNvSpPr txBox="1"/>
           <p:nvPr/>
         </p:nvSpPr>
@@ -8295,7 +8371,7 @@
       </p:sp>
       <p:sp>
         <p:nvSpPr>
-          <p:cNvPr id="10" name="Shape 7"/>
+          <p:cNvPr id="11" name="Shape 7"/>
           <p:cNvSpPr/>
           <p:nvPr/>
         </p:nvSpPr>
@@ -8329,7 +8405,7 @@
       </p:sp>
       <p:sp>
         <p:nvSpPr>
-          <p:cNvPr id="11" name="Text 8"/>
+          <p:cNvPr id="12" name="Text 8"/>
           <p:cNvSpPr txBox="1"/>
           <p:nvPr/>
         </p:nvSpPr>
@@ -8368,7 +8444,7 @@
       </p:sp>
       <p:sp>
         <p:nvSpPr>
-          <p:cNvPr id="12" name="Text 9"/>
+          <p:cNvPr id="13" name="Text 9"/>
           <p:cNvSpPr txBox="1"/>
           <p:nvPr/>
         </p:nvSpPr>
@@ -8407,7 +8483,7 @@
       </p:sp>
       <p:sp>
         <p:nvSpPr>
-          <p:cNvPr id="13" name="Shape 10"/>
+          <p:cNvPr id="14" name="Shape 10"/>
           <p:cNvSpPr/>
           <p:nvPr/>
         </p:nvSpPr>
@@ -8441,7 +8517,7 @@
       </p:sp>
       <p:sp>
         <p:nvSpPr>
-          <p:cNvPr id="14" name="Text 11"/>
+          <p:cNvPr id="15" name="Text 11"/>
           <p:cNvSpPr txBox="1"/>
           <p:nvPr/>
         </p:nvSpPr>
@@ -8480,7 +8556,7 @@
       </p:sp>
       <p:sp>
         <p:nvSpPr>
-          <p:cNvPr id="15" name="Text 12"/>
+          <p:cNvPr id="16" name="Text 12"/>
           <p:cNvSpPr txBox="1"/>
           <p:nvPr/>
         </p:nvSpPr>
@@ -8519,7 +8595,7 @@
       </p:sp>
       <p:sp>
         <p:nvSpPr>
-          <p:cNvPr id="16" name="Shape 13"/>
+          <p:cNvPr id="17" name="Shape 13"/>
           <p:cNvSpPr/>
           <p:nvPr/>
         </p:nvSpPr>
@@ -8553,7 +8629,7 @@
       </p:sp>
       <p:sp>
         <p:nvSpPr>
-          <p:cNvPr id="17" name="Text 14"/>
+          <p:cNvPr id="18" name="Text 14"/>
           <p:cNvSpPr txBox="1"/>
           <p:nvPr/>
         </p:nvSpPr>
@@ -8592,7 +8668,7 @@
       </p:sp>
       <p:sp>
         <p:nvSpPr>
-          <p:cNvPr id="18" name="Text 15"/>
+          <p:cNvPr id="19" name="Text 15"/>
           <p:cNvSpPr txBox="1"/>
           <p:nvPr/>
         </p:nvSpPr>
@@ -8631,7 +8707,7 @@
       </p:sp>
       <p:sp>
         <p:nvSpPr>
-          <p:cNvPr id="19" name="Shape 16"/>
+          <p:cNvPr id="20" name="Shape 16"/>
           <p:cNvSpPr/>
           <p:nvPr/>
         </p:nvSpPr>
@@ -8665,7 +8741,7 @@
       </p:sp>
       <p:sp>
         <p:nvSpPr>
-          <p:cNvPr id="20" name="Text 17"/>
+          <p:cNvPr id="21" name="Text 17"/>
           <p:cNvSpPr txBox="1"/>
           <p:nvPr/>
         </p:nvSpPr>
@@ -8704,7 +8780,7 @@
       </p:sp>
       <p:sp>
         <p:nvSpPr>
-          <p:cNvPr id="21" name="Text 18"/>
+          <p:cNvPr id="22" name="Text 18"/>
           <p:cNvSpPr txBox="1"/>
           <p:nvPr/>
         </p:nvSpPr>
@@ -8773,9 +8849,33 @@
           <a:chExt cx="0" cy="0"/>
         </a:xfrm>
       </p:grpSpPr>
-      <p:sp>
-        <p:nvSpPr>
-          <p:cNvPr id="2" name="Text 0"/>
+      <p:pic>
+        <p:nvPicPr>
+          <p:cNvPr id="2" name="Image 0" descr="정석항공과학고등학교 교표">    </p:cNvPr>
+          <p:cNvPicPr>
+            <a:picLocks noChangeAspect="1"/>
+          </p:cNvPicPr>
+          <p:nvPr/>
+        </p:nvPicPr>
+        <p:blipFill>
+          <a:blip r:embed="rId1"/>
+          <a:stretch>
+            <a:fillRect/>
+          </a:stretch>
+        </p:blipFill>
+        <p:spPr>
+          <a:xfrm>
+            <a:off x="10753344" y="384048"/>
+            <a:ext cx="841248" cy="360274"/>
+          </a:xfrm>
+          <a:prstGeom prst="rect">
+            <a:avLst/>
+          </a:prstGeom>
+        </p:spPr>
+      </p:pic>
+      <p:sp>
+        <p:nvSpPr>
+          <p:cNvPr id="3" name="Text 0"/>
           <p:cNvSpPr txBox="1"/>
           <p:nvPr/>
         </p:nvSpPr>
@@ -8814,7 +8914,7 @@
       </p:sp>
       <p:sp>
         <p:nvSpPr>
-          <p:cNvPr id="3" name="Text 1"/>
+          <p:cNvPr id="4" name="Text 1"/>
           <p:cNvSpPr txBox="1"/>
           <p:nvPr/>
         </p:nvSpPr>
@@ -8853,7 +8953,7 @@
       </p:sp>
       <p:sp>
         <p:nvSpPr>
-          <p:cNvPr id="4" name="Shape 2"/>
+          <p:cNvPr id="5" name="Shape 2"/>
           <p:cNvSpPr/>
           <p:nvPr/>
         </p:nvSpPr>
@@ -8887,7 +8987,7 @@
       </p:sp>
       <p:sp>
         <p:nvSpPr>
-          <p:cNvPr id="5" name="Shape 3"/>
+          <p:cNvPr id="6" name="Shape 3"/>
           <p:cNvSpPr/>
           <p:nvPr/>
         </p:nvSpPr>
@@ -8907,7 +9007,7 @@
       </p:sp>
       <p:sp>
         <p:nvSpPr>
-          <p:cNvPr id="6" name="Text 4"/>
+          <p:cNvPr id="7" name="Text 4"/>
           <p:cNvSpPr txBox="1"/>
           <p:nvPr/>
         </p:nvSpPr>
@@ -8946,7 +9046,7 @@
       </p:sp>
       <p:sp>
         <p:nvSpPr>
-          <p:cNvPr id="7" name="Text 5"/>
+          <p:cNvPr id="8" name="Text 5"/>
           <p:cNvSpPr txBox="1"/>
           <p:nvPr/>
         </p:nvSpPr>
@@ -9008,7 +9108,7 @@
       </p:sp>
       <p:sp>
         <p:nvSpPr>
-          <p:cNvPr id="8" name="Text 6"/>
+          <p:cNvPr id="9" name="Text 6"/>
           <p:cNvSpPr txBox="1"/>
           <p:nvPr/>
         </p:nvSpPr>
@@ -9047,7 +9147,7 @@
       </p:sp>
       <p:sp>
         <p:nvSpPr>
-          <p:cNvPr id="9" name="Shape 7"/>
+          <p:cNvPr id="10" name="Shape 7"/>
           <p:cNvSpPr/>
           <p:nvPr/>
         </p:nvSpPr>
@@ -9067,7 +9167,7 @@
       </p:sp>
       <p:sp>
         <p:nvSpPr>
-          <p:cNvPr id="10" name="Shape 8"/>
+          <p:cNvPr id="11" name="Shape 8"/>
           <p:cNvSpPr/>
           <p:nvPr/>
         </p:nvSpPr>
@@ -9101,7 +9201,7 @@
       </p:sp>
       <p:sp>
         <p:nvSpPr>
-          <p:cNvPr id="11" name="Shape 9"/>
+          <p:cNvPr id="12" name="Shape 9"/>
           <p:cNvSpPr/>
           <p:nvPr/>
         </p:nvSpPr>
@@ -9121,7 +9221,7 @@
       </p:sp>
       <p:sp>
         <p:nvSpPr>
-          <p:cNvPr id="12" name="Text 10"/>
+          <p:cNvPr id="13" name="Text 10"/>
           <p:cNvSpPr txBox="1"/>
           <p:nvPr/>
         </p:nvSpPr>
@@ -9160,7 +9260,7 @@
       </p:sp>
       <p:sp>
         <p:nvSpPr>
-          <p:cNvPr id="13" name="Text 11"/>
+          <p:cNvPr id="14" name="Text 11"/>
           <p:cNvSpPr txBox="1"/>
           <p:nvPr/>
         </p:nvSpPr>
@@ -9222,7 +9322,7 @@
       </p:sp>
       <p:sp>
         <p:nvSpPr>
-          <p:cNvPr id="14" name="Text 12"/>
+          <p:cNvPr id="15" name="Text 12"/>
           <p:cNvSpPr txBox="1"/>
           <p:nvPr/>
         </p:nvSpPr>
@@ -9261,7 +9361,7 @@
       </p:sp>
       <p:sp>
         <p:nvSpPr>
-          <p:cNvPr id="15" name="Shape 13"/>
+          <p:cNvPr id="16" name="Shape 13"/>
           <p:cNvSpPr/>
           <p:nvPr/>
         </p:nvSpPr>
@@ -9281,7 +9381,7 @@
       </p:sp>
       <p:sp>
         <p:nvSpPr>
-          <p:cNvPr id="16" name="Shape 14"/>
+          <p:cNvPr id="17" name="Shape 14"/>
           <p:cNvSpPr/>
           <p:nvPr/>
         </p:nvSpPr>
@@ -9315,7 +9415,7 @@
       </p:sp>
       <p:sp>
         <p:nvSpPr>
-          <p:cNvPr id="17" name="Shape 15"/>
+          <p:cNvPr id="18" name="Shape 15"/>
           <p:cNvSpPr/>
           <p:nvPr/>
         </p:nvSpPr>
@@ -9335,7 +9435,7 @@
       </p:sp>
       <p:sp>
         <p:nvSpPr>
-          <p:cNvPr id="18" name="Text 16"/>
+          <p:cNvPr id="19" name="Text 16"/>
           <p:cNvSpPr txBox="1"/>
           <p:nvPr/>
         </p:nvSpPr>
@@ -9374,7 +9474,7 @@
       </p:sp>
       <p:sp>
         <p:nvSpPr>
-          <p:cNvPr id="19" name="Text 17"/>
+          <p:cNvPr id="20" name="Text 17"/>
           <p:cNvSpPr txBox="1"/>
           <p:nvPr/>
         </p:nvSpPr>
@@ -9456,7 +9556,7 @@
       </p:sp>
       <p:sp>
         <p:nvSpPr>
-          <p:cNvPr id="20" name="Text 18"/>
+          <p:cNvPr id="21" name="Text 18"/>
           <p:cNvSpPr txBox="1"/>
           <p:nvPr/>
         </p:nvSpPr>
@@ -9495,7 +9595,7 @@
       </p:sp>
       <p:sp>
         <p:nvSpPr>
-          <p:cNvPr id="21" name="Shape 19"/>
+          <p:cNvPr id="22" name="Shape 19"/>
           <p:cNvSpPr/>
           <p:nvPr/>
         </p:nvSpPr>
@@ -9515,7 +9615,7 @@
       </p:sp>
       <p:sp>
         <p:nvSpPr>
-          <p:cNvPr id="22" name="Shape 20"/>
+          <p:cNvPr id="23" name="Shape 20"/>
           <p:cNvSpPr/>
           <p:nvPr/>
         </p:nvSpPr>
@@ -9549,7 +9649,7 @@
       </p:sp>
       <p:sp>
         <p:nvSpPr>
-          <p:cNvPr id="23" name="Shape 21"/>
+          <p:cNvPr id="24" name="Shape 21"/>
           <p:cNvSpPr/>
           <p:nvPr/>
         </p:nvSpPr>
@@ -9569,7 +9669,7 @@
       </p:sp>
       <p:sp>
         <p:nvSpPr>
-          <p:cNvPr id="24" name="Text 22"/>
+          <p:cNvPr id="25" name="Text 22"/>
           <p:cNvSpPr txBox="1"/>
           <p:nvPr/>
         </p:nvSpPr>
@@ -9608,7 +9708,7 @@
       </p:sp>
       <p:sp>
         <p:nvSpPr>
-          <p:cNvPr id="25" name="Text 23"/>
+          <p:cNvPr id="26" name="Text 23"/>
           <p:cNvSpPr txBox="1"/>
           <p:nvPr/>
         </p:nvSpPr>
@@ -9670,7 +9770,7 @@
       </p:sp>
       <p:sp>
         <p:nvSpPr>
-          <p:cNvPr id="26" name="Text 24"/>
+          <p:cNvPr id="27" name="Text 24"/>
           <p:cNvSpPr txBox="1"/>
           <p:nvPr/>
         </p:nvSpPr>
@@ -9709,7 +9809,7 @@
       </p:sp>
       <p:sp>
         <p:nvSpPr>
-          <p:cNvPr id="27" name="Shape 25"/>
+          <p:cNvPr id="28" name="Shape 25"/>
           <p:cNvSpPr/>
           <p:nvPr/>
         </p:nvSpPr>
@@ -9729,7 +9829,7 @@
       </p:sp>
       <p:sp>
         <p:nvSpPr>
-          <p:cNvPr id="28" name="Shape 26"/>
+          <p:cNvPr id="29" name="Shape 26"/>
           <p:cNvSpPr/>
           <p:nvPr/>
         </p:nvSpPr>
@@ -9763,7 +9863,7 @@
       </p:sp>
       <p:sp>
         <p:nvSpPr>
-          <p:cNvPr id="29" name="Shape 27"/>
+          <p:cNvPr id="30" name="Shape 27"/>
           <p:cNvSpPr/>
           <p:nvPr/>
         </p:nvSpPr>
@@ -9783,7 +9883,7 @@
       </p:sp>
       <p:sp>
         <p:nvSpPr>
-          <p:cNvPr id="30" name="Text 28"/>
+          <p:cNvPr id="31" name="Text 28"/>
           <p:cNvSpPr txBox="1"/>
           <p:nvPr/>
         </p:nvSpPr>
@@ -9822,7 +9922,7 @@
       </p:sp>
       <p:sp>
         <p:nvSpPr>
-          <p:cNvPr id="31" name="Text 29"/>
+          <p:cNvPr id="32" name="Text 29"/>
           <p:cNvSpPr txBox="1"/>
           <p:nvPr/>
         </p:nvSpPr>
@@ -9864,7 +9964,7 @@
       </p:sp>
       <p:sp>
         <p:nvSpPr>
-          <p:cNvPr id="32" name="Text 30"/>
+          <p:cNvPr id="33" name="Text 30"/>
           <p:cNvSpPr txBox="1"/>
           <p:nvPr/>
         </p:nvSpPr>
@@ -9903,7 +10003,7 @@
       </p:sp>
       <p:sp>
         <p:nvSpPr>
-          <p:cNvPr id="33" name="Shape 31"/>
+          <p:cNvPr id="34" name="Shape 31"/>
           <p:cNvSpPr/>
           <p:nvPr/>
         </p:nvSpPr>
@@ -9937,7 +10037,7 @@
       </p:sp>
       <p:sp>
         <p:nvSpPr>
-          <p:cNvPr id="34" name="Text 32"/>
+          <p:cNvPr id="35" name="Text 32"/>
           <p:cNvSpPr txBox="1"/>
           <p:nvPr/>
         </p:nvSpPr>
@@ -10006,9 +10106,33 @@
           <a:chExt cx="0" cy="0"/>
         </a:xfrm>
       </p:grpSpPr>
-      <p:sp>
-        <p:nvSpPr>
-          <p:cNvPr id="2" name="Text 0"/>
+      <p:pic>
+        <p:nvPicPr>
+          <p:cNvPr id="2" name="Image 0" descr="정석항공과학고등학교 교표">    </p:cNvPr>
+          <p:cNvPicPr>
+            <a:picLocks noChangeAspect="1"/>
+          </p:cNvPicPr>
+          <p:nvPr/>
+        </p:nvPicPr>
+        <p:blipFill>
+          <a:blip r:embed="rId1"/>
+          <a:stretch>
+            <a:fillRect/>
+          </a:stretch>
+        </p:blipFill>
+        <p:spPr>
+          <a:xfrm>
+            <a:off x="10753344" y="384048"/>
+            <a:ext cx="841248" cy="360274"/>
+          </a:xfrm>
+          <a:prstGeom prst="rect">
+            <a:avLst/>
+          </a:prstGeom>
+        </p:spPr>
+      </p:pic>
+      <p:sp>
+        <p:nvSpPr>
+          <p:cNvPr id="3" name="Text 0"/>
           <p:cNvSpPr txBox="1"/>
           <p:nvPr/>
         </p:nvSpPr>
@@ -10047,7 +10171,7 @@
       </p:sp>
       <p:sp>
         <p:nvSpPr>
-          <p:cNvPr id="3" name="Text 1"/>
+          <p:cNvPr id="4" name="Text 1"/>
           <p:cNvSpPr txBox="1"/>
           <p:nvPr/>
         </p:nvSpPr>
@@ -10086,7 +10210,7 @@
       </p:sp>
       <p:sp>
         <p:nvSpPr>
-          <p:cNvPr id="4" name="Shape 2"/>
+          <p:cNvPr id="5" name="Shape 2"/>
           <p:cNvSpPr/>
           <p:nvPr/>
         </p:nvSpPr>
@@ -10120,7 +10244,7 @@
       </p:sp>
       <p:sp>
         <p:nvSpPr>
-          <p:cNvPr id="5" name="Shape 3"/>
+          <p:cNvPr id="6" name="Shape 3"/>
           <p:cNvSpPr/>
           <p:nvPr/>
         </p:nvSpPr>
@@ -10140,7 +10264,7 @@
       </p:sp>
       <p:sp>
         <p:nvSpPr>
-          <p:cNvPr id="6" name="Text 4"/>
+          <p:cNvPr id="7" name="Text 4"/>
           <p:cNvSpPr txBox="1"/>
           <p:nvPr/>
         </p:nvSpPr>
@@ -10179,7 +10303,7 @@
       </p:sp>
       <p:sp>
         <p:nvSpPr>
-          <p:cNvPr id="7" name="Text 5"/>
+          <p:cNvPr id="8" name="Text 5"/>
           <p:cNvSpPr txBox="1"/>
           <p:nvPr/>
         </p:nvSpPr>
@@ -10221,7 +10345,7 @@
       </p:sp>
       <p:sp>
         <p:nvSpPr>
-          <p:cNvPr id="8" name="Shape 6"/>
+          <p:cNvPr id="9" name="Shape 6"/>
           <p:cNvSpPr/>
           <p:nvPr/>
         </p:nvSpPr>
@@ -10241,7 +10365,7 @@
       </p:sp>
       <p:sp>
         <p:nvSpPr>
-          <p:cNvPr id="9" name="Shape 7"/>
+          <p:cNvPr id="10" name="Shape 7"/>
           <p:cNvSpPr/>
           <p:nvPr/>
         </p:nvSpPr>
@@ -10275,7 +10399,7 @@
       </p:sp>
       <p:sp>
         <p:nvSpPr>
-          <p:cNvPr id="10" name="Shape 8"/>
+          <p:cNvPr id="11" name="Shape 8"/>
           <p:cNvSpPr/>
           <p:nvPr/>
         </p:nvSpPr>
@@ -10295,7 +10419,7 @@
       </p:sp>
       <p:sp>
         <p:nvSpPr>
-          <p:cNvPr id="11" name="Text 9"/>
+          <p:cNvPr id="12" name="Text 9"/>
           <p:cNvSpPr txBox="1"/>
           <p:nvPr/>
         </p:nvSpPr>
@@ -10334,7 +10458,7 @@
       </p:sp>
       <p:sp>
         <p:nvSpPr>
-          <p:cNvPr id="12" name="Text 10"/>
+          <p:cNvPr id="13" name="Text 10"/>
           <p:cNvSpPr txBox="1"/>
           <p:nvPr/>
         </p:nvSpPr>
@@ -10376,7 +10500,7 @@
       </p:sp>
       <p:sp>
         <p:nvSpPr>
-          <p:cNvPr id="13" name="Text 11"/>
+          <p:cNvPr id="14" name="Text 11"/>
           <p:cNvSpPr txBox="1"/>
           <p:nvPr/>
         </p:nvSpPr>
@@ -10418,7 +10542,7 @@
       </p:sp>
       <p:sp>
         <p:nvSpPr>
-          <p:cNvPr id="14" name="Shape 12"/>
+          <p:cNvPr id="15" name="Shape 12"/>
           <p:cNvSpPr/>
           <p:nvPr/>
         </p:nvSpPr>
@@ -10438,7 +10562,7 @@
       </p:sp>
       <p:sp>
         <p:nvSpPr>
-          <p:cNvPr id="15" name="Shape 13"/>
+          <p:cNvPr id="16" name="Shape 13"/>
           <p:cNvSpPr/>
           <p:nvPr/>
         </p:nvSpPr>
@@ -10472,7 +10596,7 @@
       </p:sp>
       <p:sp>
         <p:nvSpPr>
-          <p:cNvPr id="16" name="Shape 14"/>
+          <p:cNvPr id="17" name="Shape 14"/>
           <p:cNvSpPr/>
           <p:nvPr/>
         </p:nvSpPr>
@@ -10492,7 +10616,7 @@
       </p:sp>
       <p:sp>
         <p:nvSpPr>
-          <p:cNvPr id="17" name="Text 15"/>
+          <p:cNvPr id="18" name="Text 15"/>
           <p:cNvSpPr txBox="1"/>
           <p:nvPr/>
         </p:nvSpPr>
@@ -10531,7 +10655,7 @@
       </p:sp>
       <p:sp>
         <p:nvSpPr>
-          <p:cNvPr id="18" name="Text 16"/>
+          <p:cNvPr id="19" name="Text 16"/>
           <p:cNvSpPr txBox="1"/>
           <p:nvPr/>
         </p:nvSpPr>
@@ -10593,7 +10717,7 @@
       </p:sp>
       <p:sp>
         <p:nvSpPr>
-          <p:cNvPr id="19" name="Text 17"/>
+          <p:cNvPr id="20" name="Text 17"/>
           <p:cNvSpPr txBox="1"/>
           <p:nvPr/>
         </p:nvSpPr>
@@ -10655,7 +10779,7 @@
       </p:sp>
       <p:sp>
         <p:nvSpPr>
-          <p:cNvPr id="20" name="Shape 18"/>
+          <p:cNvPr id="21" name="Shape 18"/>
           <p:cNvSpPr/>
           <p:nvPr/>
         </p:nvSpPr>
@@ -10675,7 +10799,7 @@
       </p:sp>
       <p:sp>
         <p:nvSpPr>
-          <p:cNvPr id="21" name="Shape 19"/>
+          <p:cNvPr id="22" name="Shape 19"/>
           <p:cNvSpPr/>
           <p:nvPr/>
         </p:nvSpPr>
@@ -10709,7 +10833,7 @@
       </p:sp>
       <p:sp>
         <p:nvSpPr>
-          <p:cNvPr id="22" name="Shape 20"/>
+          <p:cNvPr id="23" name="Shape 20"/>
           <p:cNvSpPr/>
           <p:nvPr/>
         </p:nvSpPr>
@@ -10729,7 +10853,7 @@
       </p:sp>
       <p:sp>
         <p:nvSpPr>
-          <p:cNvPr id="23" name="Text 21"/>
+          <p:cNvPr id="24" name="Text 21"/>
           <p:cNvSpPr txBox="1"/>
           <p:nvPr/>
         </p:nvSpPr>
@@ -10768,7 +10892,7 @@
       </p:sp>
       <p:sp>
         <p:nvSpPr>
-          <p:cNvPr id="24" name="Text 22"/>
+          <p:cNvPr id="25" name="Text 22"/>
           <p:cNvSpPr txBox="1"/>
           <p:nvPr/>
         </p:nvSpPr>
@@ -10830,7 +10954,7 @@
       </p:sp>
       <p:sp>
         <p:nvSpPr>
-          <p:cNvPr id="25" name="Text 23"/>
+          <p:cNvPr id="26" name="Text 23"/>
           <p:cNvSpPr txBox="1"/>
           <p:nvPr/>
         </p:nvSpPr>
@@ -10915,7 +11039,7 @@
       </p:sp>
       <p:sp>
         <p:nvSpPr>
-          <p:cNvPr id="26" name="Shape 24"/>
+          <p:cNvPr id="27" name="Shape 24"/>
           <p:cNvSpPr/>
           <p:nvPr/>
         </p:nvSpPr>
@@ -10935,7 +11059,7 @@
       </p:sp>
       <p:sp>
         <p:nvSpPr>
-          <p:cNvPr id="27" name="Shape 25"/>
+          <p:cNvPr id="28" name="Shape 25"/>
           <p:cNvSpPr/>
           <p:nvPr/>
         </p:nvSpPr>
@@ -10969,7 +11093,7 @@
       </p:sp>
       <p:sp>
         <p:nvSpPr>
-          <p:cNvPr id="28" name="Shape 26"/>
+          <p:cNvPr id="29" name="Shape 26"/>
           <p:cNvSpPr/>
           <p:nvPr/>
         </p:nvSpPr>
@@ -10989,7 +11113,7 @@
       </p:sp>
       <p:sp>
         <p:nvSpPr>
-          <p:cNvPr id="29" name="Text 27"/>
+          <p:cNvPr id="30" name="Text 27"/>
           <p:cNvSpPr txBox="1"/>
           <p:nvPr/>
         </p:nvSpPr>
@@ -11028,7 +11152,7 @@
       </p:sp>
       <p:sp>
         <p:nvSpPr>
-          <p:cNvPr id="30" name="Text 28"/>
+          <p:cNvPr id="31" name="Text 28"/>
           <p:cNvSpPr txBox="1"/>
           <p:nvPr/>
         </p:nvSpPr>
@@ -11090,7 +11214,7 @@
       </p:sp>
       <p:sp>
         <p:nvSpPr>
-          <p:cNvPr id="31" name="Text 29"/>
+          <p:cNvPr id="32" name="Text 29"/>
           <p:cNvSpPr txBox="1"/>
           <p:nvPr/>
         </p:nvSpPr>
@@ -11132,7 +11256,7 @@
       </p:sp>
       <p:sp>
         <p:nvSpPr>
-          <p:cNvPr id="32" name="Shape 30"/>
+          <p:cNvPr id="33" name="Shape 30"/>
           <p:cNvSpPr/>
           <p:nvPr/>
         </p:nvSpPr>
@@ -11166,7 +11290,7 @@
       </p:sp>
       <p:sp>
         <p:nvSpPr>
-          <p:cNvPr id="33" name="Text 31"/>
+          <p:cNvPr id="34" name="Text 31"/>
           <p:cNvSpPr txBox="1"/>
           <p:nvPr/>
         </p:nvSpPr>
@@ -11205,7 +11329,7 @@
       </p:sp>
       <p:sp>
         <p:nvSpPr>
-          <p:cNvPr id="34" name="Text 32"/>
+          <p:cNvPr id="35" name="Text 32"/>
           <p:cNvSpPr txBox="1"/>
           <p:nvPr/>
         </p:nvSpPr>
@@ -11247,7 +11371,7 @@
       </p:sp>
       <p:sp>
         <p:nvSpPr>
-          <p:cNvPr id="35" name="Shape 33"/>
+          <p:cNvPr id="36" name="Shape 33"/>
           <p:cNvSpPr/>
           <p:nvPr/>
         </p:nvSpPr>
@@ -11281,7 +11405,7 @@
       </p:sp>
       <p:sp>
         <p:nvSpPr>
-          <p:cNvPr id="36" name="Text 34"/>
+          <p:cNvPr id="37" name="Text 34"/>
           <p:cNvSpPr txBox="1"/>
           <p:nvPr/>
         </p:nvSpPr>
@@ -11320,7 +11444,7 @@
       </p:sp>
       <p:sp>
         <p:nvSpPr>
-          <p:cNvPr id="37" name="Text 35"/>
+          <p:cNvPr id="38" name="Text 35"/>
           <p:cNvSpPr txBox="1"/>
           <p:nvPr/>
         </p:nvSpPr>
@@ -11392,9 +11516,33 @@
           <a:chExt cx="0" cy="0"/>
         </a:xfrm>
       </p:grpSpPr>
-      <p:sp>
-        <p:nvSpPr>
-          <p:cNvPr id="2" name="Text 0"/>
+      <p:pic>
+        <p:nvPicPr>
+          <p:cNvPr id="2" name="Image 0" descr="정석항공과학고등학교 교표">    </p:cNvPr>
+          <p:cNvPicPr>
+            <a:picLocks noChangeAspect="1"/>
+          </p:cNvPicPr>
+          <p:nvPr/>
+        </p:nvPicPr>
+        <p:blipFill>
+          <a:blip r:embed="rId1"/>
+          <a:stretch>
+            <a:fillRect/>
+          </a:stretch>
+        </p:blipFill>
+        <p:spPr>
+          <a:xfrm>
+            <a:off x="10753344" y="384048"/>
+            <a:ext cx="841248" cy="360274"/>
+          </a:xfrm>
+          <a:prstGeom prst="rect">
+            <a:avLst/>
+          </a:prstGeom>
+        </p:spPr>
+      </p:pic>
+      <p:sp>
+        <p:nvSpPr>
+          <p:cNvPr id="3" name="Text 0"/>
           <p:cNvSpPr txBox="1"/>
           <p:nvPr/>
         </p:nvSpPr>
@@ -11433,7 +11581,7 @@
       </p:sp>
       <p:sp>
         <p:nvSpPr>
-          <p:cNvPr id="3" name="Text 1"/>
+          <p:cNvPr id="4" name="Text 1"/>
           <p:cNvSpPr txBox="1"/>
           <p:nvPr/>
         </p:nvSpPr>
@@ -11472,66 +11620,7 @@
       </p:sp>
       <p:sp>
         <p:nvSpPr>
-          <p:cNvPr id="4" name="Shape 2"/>
-          <p:cNvSpPr/>
-          <p:nvPr/>
-        </p:nvSpPr>
-        <p:spPr>
-          <a:xfrm>
-            <a:off x="11119104" y="512064"/>
-            <a:ext cx="475488" cy="475488"/>
-          </a:xfrm>
-          <a:prstGeom prst="ellipse">
-            <a:avLst/>
-          </a:prstGeom>
-          <a:solidFill>
-            <a:srgbClr val="1E2761"/>
-          </a:solidFill>
-          <a:ln/>
-        </p:spPr>
-      </p:sp>
-      <p:sp>
-        <p:nvSpPr>
-          <p:cNvPr id="5" name="Text 3"/>
-          <p:cNvSpPr txBox="1"/>
-          <p:nvPr/>
-        </p:nvSpPr>
-        <p:spPr>
-          <a:xfrm>
-            <a:off x="11119104" y="512064"/>
-            <a:ext cx="475488" cy="475488"/>
-          </a:xfrm>
-          <a:prstGeom prst="rect">
-            <a:avLst/>
-          </a:prstGeom>
-          <a:noFill/>
-          <a:ln/>
-        </p:spPr>
-        <p:txBody>
-          <a:bodyPr wrap="square" lIns="0" tIns="0" rIns="0" bIns="0" rtlCol="0" anchor="ctr"/>
-          <a:lstStyle/>
-          <a:p>
-            <a:pPr algn="ctr" indent="0" marL="0">
-              <a:buNone/>
-            </a:pPr>
-            <a:r>
-              <a:rPr lang="en-US" sz="1500" b="1" dirty="0">
-                <a:solidFill>
-                  <a:srgbClr val="FFFFFF"/>
-                </a:solidFill>
-                <a:latin typeface="맑은 고딕" pitchFamily="34" charset="0"/>
-                <a:ea typeface="맑은 고딕" pitchFamily="34" charset="-122"/>
-                <a:cs typeface="맑은 고딕" pitchFamily="34" charset="-120"/>
-              </a:rPr>
-              <a:t>1</a:t>
-            </a:r>
-            <a:endParaRPr lang="en-US" sz="1500" dirty="0"/>
-          </a:p>
-        </p:txBody>
-      </p:sp>
-      <p:sp>
-        <p:nvSpPr>
-          <p:cNvPr id="6" name="Shape 4"/>
+          <p:cNvPr id="5" name="Shape 2"/>
           <p:cNvSpPr/>
           <p:nvPr/>
         </p:nvSpPr>
@@ -11565,7 +11654,7 @@
       </p:sp>
       <p:sp>
         <p:nvSpPr>
-          <p:cNvPr id="7" name="Text 5"/>
+          <p:cNvPr id="6" name="Text 3"/>
           <p:cNvSpPr txBox="1"/>
           <p:nvPr/>
         </p:nvSpPr>
@@ -11604,7 +11693,7 @@
       </p:sp>
       <p:sp>
         <p:nvSpPr>
-          <p:cNvPr id="8" name="Shape 6"/>
+          <p:cNvPr id="7" name="Shape 4"/>
           <p:cNvSpPr/>
           <p:nvPr/>
         </p:nvSpPr>
@@ -11624,7 +11713,7 @@
       </p:sp>
       <p:sp>
         <p:nvSpPr>
-          <p:cNvPr id="9" name="Text 7"/>
+          <p:cNvPr id="8" name="Text 5"/>
           <p:cNvSpPr txBox="1"/>
           <p:nvPr/>
         </p:nvSpPr>
@@ -11666,7 +11755,7 @@
       </p:sp>
       <p:sp>
         <p:nvSpPr>
-          <p:cNvPr id="10" name="Shape 8"/>
+          <p:cNvPr id="9" name="Shape 6"/>
           <p:cNvSpPr/>
           <p:nvPr/>
         </p:nvSpPr>
@@ -11686,7 +11775,7 @@
       </p:sp>
       <p:sp>
         <p:nvSpPr>
-          <p:cNvPr id="11" name="Text 9"/>
+          <p:cNvPr id="10" name="Text 7"/>
           <p:cNvSpPr txBox="1"/>
           <p:nvPr/>
         </p:nvSpPr>
@@ -11728,7 +11817,7 @@
       </p:sp>
       <p:sp>
         <p:nvSpPr>
-          <p:cNvPr id="12" name="Shape 10"/>
+          <p:cNvPr id="11" name="Shape 8"/>
           <p:cNvSpPr/>
           <p:nvPr/>
         </p:nvSpPr>
@@ -11762,7 +11851,7 @@
       </p:sp>
       <p:sp>
         <p:nvSpPr>
-          <p:cNvPr id="13" name="Text 11"/>
+          <p:cNvPr id="12" name="Text 9"/>
           <p:cNvSpPr txBox="1"/>
           <p:nvPr/>
         </p:nvSpPr>
@@ -11801,7 +11890,7 @@
       </p:sp>
       <p:sp>
         <p:nvSpPr>
-          <p:cNvPr id="14" name="Text 12"/>
+          <p:cNvPr id="13" name="Text 10"/>
           <p:cNvSpPr txBox="1"/>
           <p:nvPr/>
         </p:nvSpPr>
@@ -11840,7 +11929,7 @@
       </p:sp>
       <p:sp>
         <p:nvSpPr>
-          <p:cNvPr id="15" name="Text 13"/>
+          <p:cNvPr id="14" name="Text 11"/>
           <p:cNvSpPr txBox="1"/>
           <p:nvPr/>
         </p:nvSpPr>
@@ -11879,7 +11968,7 @@
       </p:sp>
       <p:sp>
         <p:nvSpPr>
-          <p:cNvPr id="16" name="Shape 14"/>
+          <p:cNvPr id="15" name="Shape 12"/>
           <p:cNvSpPr/>
           <p:nvPr/>
         </p:nvSpPr>
@@ -11913,7 +12002,7 @@
       </p:sp>
       <p:sp>
         <p:nvSpPr>
-          <p:cNvPr id="17" name="Shape 15"/>
+          <p:cNvPr id="16" name="Shape 13"/>
           <p:cNvSpPr/>
           <p:nvPr/>
         </p:nvSpPr>
@@ -11933,7 +12022,7 @@
       </p:sp>
       <p:sp>
         <p:nvSpPr>
-          <p:cNvPr id="18" name="Text 16"/>
+          <p:cNvPr id="17" name="Text 14"/>
           <p:cNvSpPr txBox="1"/>
           <p:nvPr/>
         </p:nvSpPr>
@@ -11972,7 +12061,7 @@
       </p:sp>
       <p:sp>
         <p:nvSpPr>
-          <p:cNvPr id="19" name="Text 17"/>
+          <p:cNvPr id="18" name="Text 15"/>
           <p:cNvSpPr txBox="1"/>
           <p:nvPr/>
         </p:nvSpPr>
@@ -12014,7 +12103,7 @@
       </p:sp>
       <p:sp>
         <p:nvSpPr>
-          <p:cNvPr id="20" name="Shape 18"/>
+          <p:cNvPr id="19" name="Shape 16"/>
           <p:cNvSpPr/>
           <p:nvPr/>
         </p:nvSpPr>
@@ -12048,7 +12137,7 @@
       </p:sp>
       <p:sp>
         <p:nvSpPr>
-          <p:cNvPr id="21" name="Shape 19"/>
+          <p:cNvPr id="20" name="Shape 17"/>
           <p:cNvSpPr/>
           <p:nvPr/>
         </p:nvSpPr>
@@ -12068,7 +12157,7 @@
       </p:sp>
       <p:sp>
         <p:nvSpPr>
-          <p:cNvPr id="22" name="Text 20"/>
+          <p:cNvPr id="21" name="Text 18"/>
           <p:cNvSpPr txBox="1"/>
           <p:nvPr/>
         </p:nvSpPr>
@@ -12107,7 +12196,7 @@
       </p:sp>
       <p:sp>
         <p:nvSpPr>
-          <p:cNvPr id="23" name="Text 21"/>
+          <p:cNvPr id="22" name="Text 19"/>
           <p:cNvSpPr txBox="1"/>
           <p:nvPr/>
         </p:nvSpPr>
@@ -12149,7 +12238,7 @@
       </p:sp>
       <p:sp>
         <p:nvSpPr>
-          <p:cNvPr id="24" name="Shape 22"/>
+          <p:cNvPr id="23" name="Shape 20"/>
           <p:cNvSpPr/>
           <p:nvPr/>
         </p:nvSpPr>
@@ -12183,7 +12272,7 @@
       </p:sp>
       <p:sp>
         <p:nvSpPr>
-          <p:cNvPr id="25" name="Shape 23"/>
+          <p:cNvPr id="24" name="Shape 21"/>
           <p:cNvSpPr/>
           <p:nvPr/>
         </p:nvSpPr>
@@ -12203,7 +12292,7 @@
       </p:sp>
       <p:sp>
         <p:nvSpPr>
-          <p:cNvPr id="26" name="Text 24"/>
+          <p:cNvPr id="25" name="Text 22"/>
           <p:cNvSpPr txBox="1"/>
           <p:nvPr/>
         </p:nvSpPr>
@@ -12242,7 +12331,7 @@
       </p:sp>
       <p:sp>
         <p:nvSpPr>
-          <p:cNvPr id="27" name="Text 25"/>
+          <p:cNvPr id="26" name="Text 23"/>
           <p:cNvSpPr txBox="1"/>
           <p:nvPr/>
         </p:nvSpPr>
@@ -12284,7 +12373,7 @@
       </p:sp>
       <p:sp>
         <p:nvSpPr>
-          <p:cNvPr id="28" name="Shape 26"/>
+          <p:cNvPr id="27" name="Shape 24"/>
           <p:cNvSpPr/>
           <p:nvPr/>
         </p:nvSpPr>
@@ -12318,7 +12407,7 @@
       </p:sp>
       <p:sp>
         <p:nvSpPr>
-          <p:cNvPr id="29" name="Shape 27"/>
+          <p:cNvPr id="28" name="Shape 25"/>
           <p:cNvSpPr/>
           <p:nvPr/>
         </p:nvSpPr>
@@ -12338,7 +12427,7 @@
       </p:sp>
       <p:sp>
         <p:nvSpPr>
-          <p:cNvPr id="30" name="Text 28"/>
+          <p:cNvPr id="29" name="Text 26"/>
           <p:cNvSpPr txBox="1"/>
           <p:nvPr/>
         </p:nvSpPr>
@@ -12377,7 +12466,7 @@
       </p:sp>
       <p:sp>
         <p:nvSpPr>
-          <p:cNvPr id="31" name="Text 29"/>
+          <p:cNvPr id="30" name="Text 27"/>
           <p:cNvSpPr txBox="1"/>
           <p:nvPr/>
         </p:nvSpPr>
@@ -12449,9 +12538,33 @@
           <a:chExt cx="0" cy="0"/>
         </a:xfrm>
       </p:grpSpPr>
-      <p:sp>
-        <p:nvSpPr>
-          <p:cNvPr id="2" name="Text 0"/>
+      <p:pic>
+        <p:nvPicPr>
+          <p:cNvPr id="2" name="Image 0" descr="정석항공과학고등학교 교표">    </p:cNvPr>
+          <p:cNvPicPr>
+            <a:picLocks noChangeAspect="1"/>
+          </p:cNvPicPr>
+          <p:nvPr/>
+        </p:nvPicPr>
+        <p:blipFill>
+          <a:blip r:embed="rId1"/>
+          <a:stretch>
+            <a:fillRect/>
+          </a:stretch>
+        </p:blipFill>
+        <p:spPr>
+          <a:xfrm>
+            <a:off x="10753344" y="384048"/>
+            <a:ext cx="841248" cy="360274"/>
+          </a:xfrm>
+          <a:prstGeom prst="rect">
+            <a:avLst/>
+          </a:prstGeom>
+        </p:spPr>
+      </p:pic>
+      <p:sp>
+        <p:nvSpPr>
+          <p:cNvPr id="3" name="Text 0"/>
           <p:cNvSpPr txBox="1"/>
           <p:nvPr/>
         </p:nvSpPr>
@@ -12490,7 +12603,7 @@
       </p:sp>
       <p:sp>
         <p:nvSpPr>
-          <p:cNvPr id="3" name="Text 1"/>
+          <p:cNvPr id="4" name="Text 1"/>
           <p:cNvSpPr txBox="1"/>
           <p:nvPr/>
         </p:nvSpPr>
@@ -12529,66 +12642,7 @@
       </p:sp>
       <p:sp>
         <p:nvSpPr>
-          <p:cNvPr id="4" name="Shape 2"/>
-          <p:cNvSpPr/>
-          <p:nvPr/>
-        </p:nvSpPr>
-        <p:spPr>
-          <a:xfrm>
-            <a:off x="11119104" y="512064"/>
-            <a:ext cx="475488" cy="475488"/>
-          </a:xfrm>
-          <a:prstGeom prst="ellipse">
-            <a:avLst/>
-          </a:prstGeom>
-          <a:solidFill>
-            <a:srgbClr val="1E2761"/>
-          </a:solidFill>
-          <a:ln/>
-        </p:spPr>
-      </p:sp>
-      <p:sp>
-        <p:nvSpPr>
-          <p:cNvPr id="5" name="Text 3"/>
-          <p:cNvSpPr txBox="1"/>
-          <p:nvPr/>
-        </p:nvSpPr>
-        <p:spPr>
-          <a:xfrm>
-            <a:off x="11119104" y="512064"/>
-            <a:ext cx="475488" cy="475488"/>
-          </a:xfrm>
-          <a:prstGeom prst="rect">
-            <a:avLst/>
-          </a:prstGeom>
-          <a:noFill/>
-          <a:ln/>
-        </p:spPr>
-        <p:txBody>
-          <a:bodyPr wrap="square" lIns="0" tIns="0" rIns="0" bIns="0" rtlCol="0" anchor="ctr"/>
-          <a:lstStyle/>
-          <a:p>
-            <a:pPr algn="ctr" indent="0" marL="0">
-              <a:buNone/>
-            </a:pPr>
-            <a:r>
-              <a:rPr lang="en-US" sz="1500" b="1" dirty="0">
-                <a:solidFill>
-                  <a:srgbClr val="FFFFFF"/>
-                </a:solidFill>
-                <a:latin typeface="맑은 고딕" pitchFamily="34" charset="0"/>
-                <a:ea typeface="맑은 고딕" pitchFamily="34" charset="-122"/>
-                <a:cs typeface="맑은 고딕" pitchFamily="34" charset="-120"/>
-              </a:rPr>
-              <a:t>2</a:t>
-            </a:r>
-            <a:endParaRPr lang="en-US" sz="1500" dirty="0"/>
-          </a:p>
-        </p:txBody>
-      </p:sp>
-      <p:sp>
-        <p:nvSpPr>
-          <p:cNvPr id="6" name="Text 4"/>
+          <p:cNvPr id="5" name="Text 2"/>
           <p:cNvSpPr txBox="1"/>
           <p:nvPr/>
         </p:nvSpPr>
@@ -12641,7 +12695,7 @@
       </p:sp>
       <p:sp>
         <p:nvSpPr>
-          <p:cNvPr id="7" name="Text 5"/>
+          <p:cNvPr id="6" name="Text 3"/>
           <p:cNvSpPr txBox="1"/>
           <p:nvPr/>
         </p:nvSpPr>
@@ -13698,7 +13752,7 @@
       </p:graphicFrame>
       <p:sp>
         <p:nvSpPr>
-          <p:cNvPr id="9" name="Shape 6"/>
+          <p:cNvPr id="8" name="Shape 4"/>
           <p:cNvSpPr/>
           <p:nvPr/>
         </p:nvSpPr>
@@ -13732,7 +13786,7 @@
       </p:sp>
       <p:sp>
         <p:nvSpPr>
-          <p:cNvPr id="10" name="Text 7"/>
+          <p:cNvPr id="9" name="Text 5"/>
           <p:cNvSpPr txBox="1"/>
           <p:nvPr/>
         </p:nvSpPr>
@@ -13794,7 +13848,7 @@
       </p:sp>
       <p:sp>
         <p:nvSpPr>
-          <p:cNvPr id="11" name="Shape 8"/>
+          <p:cNvPr id="10" name="Shape 6"/>
           <p:cNvSpPr/>
           <p:nvPr/>
         </p:nvSpPr>
@@ -13814,7 +13868,7 @@
       </p:sp>
       <p:sp>
         <p:nvSpPr>
-          <p:cNvPr id="12" name="Text 9"/>
+          <p:cNvPr id="11" name="Text 7"/>
           <p:cNvSpPr txBox="1"/>
           <p:nvPr/>
         </p:nvSpPr>
@@ -13856,7 +13910,7 @@
       </p:sp>
       <p:sp>
         <p:nvSpPr>
-          <p:cNvPr id="13" name="Shape 10"/>
+          <p:cNvPr id="12" name="Shape 8"/>
           <p:cNvSpPr/>
           <p:nvPr/>
         </p:nvSpPr>
@@ -13876,7 +13930,7 @@
       </p:sp>
       <p:sp>
         <p:nvSpPr>
-          <p:cNvPr id="14" name="Text 11"/>
+          <p:cNvPr id="13" name="Text 9"/>
           <p:cNvSpPr txBox="1"/>
           <p:nvPr/>
         </p:nvSpPr>
@@ -13918,7 +13972,7 @@
       </p:sp>
       <p:sp>
         <p:nvSpPr>
-          <p:cNvPr id="15" name="Shape 12"/>
+          <p:cNvPr id="14" name="Shape 10"/>
           <p:cNvSpPr/>
           <p:nvPr/>
         </p:nvSpPr>
@@ -13938,7 +13992,7 @@
       </p:sp>
       <p:sp>
         <p:nvSpPr>
-          <p:cNvPr id="16" name="Text 13"/>
+          <p:cNvPr id="15" name="Text 11"/>
           <p:cNvSpPr txBox="1"/>
           <p:nvPr/>
         </p:nvSpPr>
@@ -13980,7 +14034,7 @@
       </p:sp>
       <p:sp>
         <p:nvSpPr>
-          <p:cNvPr id="17" name="Shape 14"/>
+          <p:cNvPr id="16" name="Shape 12"/>
           <p:cNvSpPr/>
           <p:nvPr/>
         </p:nvSpPr>
@@ -14014,7 +14068,7 @@
       </p:sp>
       <p:sp>
         <p:nvSpPr>
-          <p:cNvPr id="18" name="Text 15"/>
+          <p:cNvPr id="17" name="Text 13"/>
           <p:cNvSpPr txBox="1"/>
           <p:nvPr/>
         </p:nvSpPr>
@@ -14083,9 +14137,33 @@
           <a:chExt cx="0" cy="0"/>
         </a:xfrm>
       </p:grpSpPr>
-      <p:sp>
-        <p:nvSpPr>
-          <p:cNvPr id="2" name="Text 0"/>
+      <p:pic>
+        <p:nvPicPr>
+          <p:cNvPr id="2" name="Image 0" descr="정석항공과학고등학교 교표">    </p:cNvPr>
+          <p:cNvPicPr>
+            <a:picLocks noChangeAspect="1"/>
+          </p:cNvPicPr>
+          <p:nvPr/>
+        </p:nvPicPr>
+        <p:blipFill>
+          <a:blip r:embed="rId1"/>
+          <a:stretch>
+            <a:fillRect/>
+          </a:stretch>
+        </p:blipFill>
+        <p:spPr>
+          <a:xfrm>
+            <a:off x="10753344" y="384048"/>
+            <a:ext cx="841248" cy="360274"/>
+          </a:xfrm>
+          <a:prstGeom prst="rect">
+            <a:avLst/>
+          </a:prstGeom>
+        </p:spPr>
+      </p:pic>
+      <p:sp>
+        <p:nvSpPr>
+          <p:cNvPr id="3" name="Text 0"/>
           <p:cNvSpPr txBox="1"/>
           <p:nvPr/>
         </p:nvSpPr>
@@ -14124,7 +14202,7 @@
       </p:sp>
       <p:sp>
         <p:nvSpPr>
-          <p:cNvPr id="3" name="Text 1"/>
+          <p:cNvPr id="4" name="Text 1"/>
           <p:cNvSpPr txBox="1"/>
           <p:nvPr/>
         </p:nvSpPr>
@@ -14163,66 +14241,7 @@
       </p:sp>
       <p:sp>
         <p:nvSpPr>
-          <p:cNvPr id="4" name="Shape 2"/>
-          <p:cNvSpPr/>
-          <p:nvPr/>
-        </p:nvSpPr>
-        <p:spPr>
-          <a:xfrm>
-            <a:off x="11119104" y="512064"/>
-            <a:ext cx="475488" cy="475488"/>
-          </a:xfrm>
-          <a:prstGeom prst="ellipse">
-            <a:avLst/>
-          </a:prstGeom>
-          <a:solidFill>
-            <a:srgbClr val="1E2761"/>
-          </a:solidFill>
-          <a:ln/>
-        </p:spPr>
-      </p:sp>
-      <p:sp>
-        <p:nvSpPr>
-          <p:cNvPr id="5" name="Text 3"/>
-          <p:cNvSpPr txBox="1"/>
-          <p:nvPr/>
-        </p:nvSpPr>
-        <p:spPr>
-          <a:xfrm>
-            <a:off x="11119104" y="512064"/>
-            <a:ext cx="475488" cy="475488"/>
-          </a:xfrm>
-          <a:prstGeom prst="rect">
-            <a:avLst/>
-          </a:prstGeom>
-          <a:noFill/>
-          <a:ln/>
-        </p:spPr>
-        <p:txBody>
-          <a:bodyPr wrap="square" lIns="0" tIns="0" rIns="0" bIns="0" rtlCol="0" anchor="ctr"/>
-          <a:lstStyle/>
-          <a:p>
-            <a:pPr algn="ctr" indent="0" marL="0">
-              <a:buNone/>
-            </a:pPr>
-            <a:r>
-              <a:rPr lang="en-US" sz="1500" b="1" dirty="0">
-                <a:solidFill>
-                  <a:srgbClr val="FFFFFF"/>
-                </a:solidFill>
-                <a:latin typeface="맑은 고딕" pitchFamily="34" charset="0"/>
-                <a:ea typeface="맑은 고딕" pitchFamily="34" charset="-122"/>
-                <a:cs typeface="맑은 고딕" pitchFamily="34" charset="-120"/>
-              </a:rPr>
-              <a:t>3</a:t>
-            </a:r>
-            <a:endParaRPr lang="en-US" sz="1500" dirty="0"/>
-          </a:p>
-        </p:txBody>
-      </p:sp>
-      <p:sp>
-        <p:nvSpPr>
-          <p:cNvPr id="6" name="Text 4"/>
+          <p:cNvPr id="5" name="Text 2"/>
           <p:cNvSpPr txBox="1"/>
           <p:nvPr/>
         </p:nvSpPr>
@@ -14275,7 +14294,7 @@
       </p:sp>
       <p:sp>
         <p:nvSpPr>
-          <p:cNvPr id="7" name="Text 5"/>
+          <p:cNvPr id="6" name="Text 3"/>
           <p:cNvSpPr txBox="1"/>
           <p:nvPr/>
         </p:nvSpPr>
@@ -15332,7 +15351,7 @@
       </p:graphicFrame>
       <p:sp>
         <p:nvSpPr>
-          <p:cNvPr id="9" name="Shape 6"/>
+          <p:cNvPr id="8" name="Shape 4"/>
           <p:cNvSpPr/>
           <p:nvPr/>
         </p:nvSpPr>
@@ -15366,7 +15385,7 @@
       </p:sp>
       <p:sp>
         <p:nvSpPr>
-          <p:cNvPr id="10" name="Text 7"/>
+          <p:cNvPr id="9" name="Text 5"/>
           <p:cNvSpPr txBox="1"/>
           <p:nvPr/>
         </p:nvSpPr>
@@ -15405,7 +15424,7 @@
       </p:sp>
       <p:graphicFrame>
         <p:nvGraphicFramePr>
-          <p:cNvPr id="11" name="Chart 0" descr=""/>
+          <p:cNvPr id="10" name="Chart 0" descr=""/>
           <p:cNvGraphicFramePr/>
           <p:nvPr/>
         </p:nvGraphicFramePr>
@@ -15415,13 +15434,13 @@
         </p:xfrm>
         <a:graphic xmlns:a="http://schemas.openxmlformats.org/drawingml/2006/main">
           <a:graphicData uri="http://schemas.openxmlformats.org/drawingml/2006/chart">
-            <c:chart xmlns:c="http://schemas.openxmlformats.org/drawingml/2006/chart" r:id="rId1"/>
+            <c:chart xmlns:c="http://schemas.openxmlformats.org/drawingml/2006/chart" r:id="rId2"/>
           </a:graphicData>
         </a:graphic>
       </p:graphicFrame>
       <p:sp>
         <p:nvSpPr>
-          <p:cNvPr id="12" name="Shape 8"/>
+          <p:cNvPr id="11" name="Shape 6"/>
           <p:cNvSpPr/>
           <p:nvPr/>
         </p:nvSpPr>
@@ -15443,7 +15462,7 @@
       </p:sp>
       <p:sp>
         <p:nvSpPr>
-          <p:cNvPr id="13" name="Text 9"/>
+          <p:cNvPr id="12" name="Text 7"/>
           <p:cNvSpPr txBox="1"/>
           <p:nvPr/>
         </p:nvSpPr>
@@ -15482,7 +15501,7 @@
       </p:sp>
       <p:sp>
         <p:nvSpPr>
-          <p:cNvPr id="14" name="Text 10"/>
+          <p:cNvPr id="13" name="Text 8"/>
           <p:cNvSpPr txBox="1"/>
           <p:nvPr/>
         </p:nvSpPr>
@@ -15521,7 +15540,7 @@
       </p:sp>
       <p:sp>
         <p:nvSpPr>
-          <p:cNvPr id="15" name="Shape 11"/>
+          <p:cNvPr id="14" name="Shape 9"/>
           <p:cNvSpPr/>
           <p:nvPr/>
         </p:nvSpPr>
@@ -15543,7 +15562,7 @@
       </p:sp>
       <p:sp>
         <p:nvSpPr>
-          <p:cNvPr id="16" name="Text 12"/>
+          <p:cNvPr id="15" name="Text 10"/>
           <p:cNvSpPr txBox="1"/>
           <p:nvPr/>
         </p:nvSpPr>
@@ -15582,7 +15601,7 @@
       </p:sp>
       <p:sp>
         <p:nvSpPr>
-          <p:cNvPr id="17" name="Text 13"/>
+          <p:cNvPr id="16" name="Text 11"/>
           <p:cNvSpPr txBox="1"/>
           <p:nvPr/>
         </p:nvSpPr>
@@ -15621,7 +15640,7 @@
       </p:sp>
       <p:sp>
         <p:nvSpPr>
-          <p:cNvPr id="18" name="Text 14"/>
+          <p:cNvPr id="17" name="Text 12"/>
           <p:cNvSpPr txBox="1"/>
           <p:nvPr/>
         </p:nvSpPr>
@@ -15660,7 +15679,7 @@
       </p:sp>
       <p:sp>
         <p:nvSpPr>
-          <p:cNvPr id="19" name="Text 15"/>
+          <p:cNvPr id="18" name="Text 13"/>
           <p:cNvSpPr txBox="1"/>
           <p:nvPr/>
         </p:nvSpPr>
@@ -15729,9 +15748,33 @@
           <a:chExt cx="0" cy="0"/>
         </a:xfrm>
       </p:grpSpPr>
-      <p:sp>
-        <p:nvSpPr>
-          <p:cNvPr id="2" name="Text 0"/>
+      <p:pic>
+        <p:nvPicPr>
+          <p:cNvPr id="2" name="Image 0" descr="정석항공과학고등학교 교표">    </p:cNvPr>
+          <p:cNvPicPr>
+            <a:picLocks noChangeAspect="1"/>
+          </p:cNvPicPr>
+          <p:nvPr/>
+        </p:nvPicPr>
+        <p:blipFill>
+          <a:blip r:embed="rId1"/>
+          <a:stretch>
+            <a:fillRect/>
+          </a:stretch>
+        </p:blipFill>
+        <p:spPr>
+          <a:xfrm>
+            <a:off x="10753344" y="384048"/>
+            <a:ext cx="841248" cy="360274"/>
+          </a:xfrm>
+          <a:prstGeom prst="rect">
+            <a:avLst/>
+          </a:prstGeom>
+        </p:spPr>
+      </p:pic>
+      <p:sp>
+        <p:nvSpPr>
+          <p:cNvPr id="3" name="Text 0"/>
           <p:cNvSpPr txBox="1"/>
           <p:nvPr/>
         </p:nvSpPr>
@@ -15770,7 +15813,7 @@
       </p:sp>
       <p:sp>
         <p:nvSpPr>
-          <p:cNvPr id="3" name="Text 1"/>
+          <p:cNvPr id="4" name="Text 1"/>
           <p:cNvSpPr txBox="1"/>
           <p:nvPr/>
         </p:nvSpPr>
@@ -15809,66 +15852,7 @@
       </p:sp>
       <p:sp>
         <p:nvSpPr>
-          <p:cNvPr id="4" name="Shape 2"/>
-          <p:cNvSpPr/>
-          <p:nvPr/>
-        </p:nvSpPr>
-        <p:spPr>
-          <a:xfrm>
-            <a:off x="11119104" y="512064"/>
-            <a:ext cx="475488" cy="475488"/>
-          </a:xfrm>
-          <a:prstGeom prst="ellipse">
-            <a:avLst/>
-          </a:prstGeom>
-          <a:solidFill>
-            <a:srgbClr val="1E2761"/>
-          </a:solidFill>
-          <a:ln/>
-        </p:spPr>
-      </p:sp>
-      <p:sp>
-        <p:nvSpPr>
-          <p:cNvPr id="5" name="Text 3"/>
-          <p:cNvSpPr txBox="1"/>
-          <p:nvPr/>
-        </p:nvSpPr>
-        <p:spPr>
-          <a:xfrm>
-            <a:off x="11119104" y="512064"/>
-            <a:ext cx="475488" cy="475488"/>
-          </a:xfrm>
-          <a:prstGeom prst="rect">
-            <a:avLst/>
-          </a:prstGeom>
-          <a:noFill/>
-          <a:ln/>
-        </p:spPr>
-        <p:txBody>
-          <a:bodyPr wrap="square" lIns="0" tIns="0" rIns="0" bIns="0" rtlCol="0" anchor="ctr"/>
-          <a:lstStyle/>
-          <a:p>
-            <a:pPr algn="ctr" indent="0" marL="0">
-              <a:buNone/>
-            </a:pPr>
-            <a:r>
-              <a:rPr lang="en-US" sz="1500" b="1" dirty="0">
-                <a:solidFill>
-                  <a:srgbClr val="FFFFFF"/>
-                </a:solidFill>
-                <a:latin typeface="맑은 고딕" pitchFamily="34" charset="0"/>
-                <a:ea typeface="맑은 고딕" pitchFamily="34" charset="-122"/>
-                <a:cs typeface="맑은 고딕" pitchFamily="34" charset="-120"/>
-              </a:rPr>
-              <a:t>4</a:t>
-            </a:r>
-            <a:endParaRPr lang="en-US" sz="1500" dirty="0"/>
-          </a:p>
-        </p:txBody>
-      </p:sp>
-      <p:sp>
-        <p:nvSpPr>
-          <p:cNvPr id="6" name="Text 4"/>
+          <p:cNvPr id="5" name="Text 2"/>
           <p:cNvSpPr txBox="1"/>
           <p:nvPr/>
         </p:nvSpPr>
@@ -15949,7 +15933,7 @@
       </p:sp>
       <p:sp>
         <p:nvSpPr>
-          <p:cNvPr id="7" name="Shape 5"/>
+          <p:cNvPr id="6" name="Shape 3"/>
           <p:cNvSpPr/>
           <p:nvPr/>
         </p:nvSpPr>
@@ -15983,7 +15967,7 @@
       </p:sp>
       <p:sp>
         <p:nvSpPr>
-          <p:cNvPr id="8" name="Text 6"/>
+          <p:cNvPr id="7" name="Text 4"/>
           <p:cNvSpPr txBox="1"/>
           <p:nvPr/>
         </p:nvSpPr>
@@ -16022,7 +16006,7 @@
       </p:sp>
       <p:sp>
         <p:nvSpPr>
-          <p:cNvPr id="9" name="Text 7"/>
+          <p:cNvPr id="8" name="Text 5"/>
           <p:cNvSpPr txBox="1"/>
           <p:nvPr/>
         </p:nvSpPr>
@@ -16061,7 +16045,7 @@
       </p:sp>
       <p:sp>
         <p:nvSpPr>
-          <p:cNvPr id="10" name="Text 8"/>
+          <p:cNvPr id="9" name="Text 6"/>
           <p:cNvSpPr txBox="1"/>
           <p:nvPr/>
         </p:nvSpPr>
@@ -16123,7 +16107,7 @@
       </p:sp>
       <p:sp>
         <p:nvSpPr>
-          <p:cNvPr id="11" name="Text 9"/>
+          <p:cNvPr id="10" name="Text 7"/>
           <p:cNvSpPr txBox="1"/>
           <p:nvPr/>
         </p:nvSpPr>
@@ -16162,7 +16146,7 @@
       </p:sp>
       <p:sp>
         <p:nvSpPr>
-          <p:cNvPr id="12" name="Text 10"/>
+          <p:cNvPr id="11" name="Text 8"/>
           <p:cNvSpPr txBox="1"/>
           <p:nvPr/>
         </p:nvSpPr>
@@ -16224,7 +16208,7 @@
       </p:sp>
       <p:sp>
         <p:nvSpPr>
-          <p:cNvPr id="13" name="Text 11"/>
+          <p:cNvPr id="12" name="Text 9"/>
           <p:cNvSpPr txBox="1"/>
           <p:nvPr/>
         </p:nvSpPr>
@@ -16940,7 +16924,7 @@
       </p:graphicFrame>
       <p:sp>
         <p:nvSpPr>
-          <p:cNvPr id="15" name="Shape 12"/>
+          <p:cNvPr id="14" name="Shape 10"/>
           <p:cNvSpPr/>
           <p:nvPr/>
         </p:nvSpPr>
@@ -16974,7 +16958,7 @@
       </p:sp>
       <p:sp>
         <p:nvSpPr>
-          <p:cNvPr id="16" name="Text 13"/>
+          <p:cNvPr id="15" name="Text 11"/>
           <p:cNvSpPr txBox="1"/>
           <p:nvPr/>
         </p:nvSpPr>
@@ -17013,7 +16997,7 @@
       </p:sp>
       <p:sp>
         <p:nvSpPr>
-          <p:cNvPr id="17" name="Shape 14"/>
+          <p:cNvPr id="16" name="Shape 12"/>
           <p:cNvSpPr/>
           <p:nvPr/>
         </p:nvSpPr>
@@ -17035,7 +17019,7 @@
       </p:sp>
       <p:sp>
         <p:nvSpPr>
-          <p:cNvPr id="18" name="Text 15"/>
+          <p:cNvPr id="17" name="Text 13"/>
           <p:cNvSpPr txBox="1"/>
           <p:nvPr/>
         </p:nvSpPr>
@@ -17074,7 +17058,7 @@
       </p:sp>
       <p:sp>
         <p:nvSpPr>
-          <p:cNvPr id="19" name="Shape 16"/>
+          <p:cNvPr id="18" name="Shape 14"/>
           <p:cNvSpPr/>
           <p:nvPr/>
         </p:nvSpPr>
@@ -17096,7 +17080,7 @@
       </p:sp>
       <p:sp>
         <p:nvSpPr>
-          <p:cNvPr id="20" name="Text 17"/>
+          <p:cNvPr id="19" name="Text 15"/>
           <p:cNvSpPr txBox="1"/>
           <p:nvPr/>
         </p:nvSpPr>
@@ -17135,7 +17119,7 @@
       </p:sp>
       <p:sp>
         <p:nvSpPr>
-          <p:cNvPr id="21" name="Shape 18"/>
+          <p:cNvPr id="20" name="Shape 16"/>
           <p:cNvSpPr/>
           <p:nvPr/>
         </p:nvSpPr>
@@ -17157,7 +17141,7 @@
       </p:sp>
       <p:sp>
         <p:nvSpPr>
-          <p:cNvPr id="22" name="Text 19"/>
+          <p:cNvPr id="21" name="Text 17"/>
           <p:cNvSpPr txBox="1"/>
           <p:nvPr/>
         </p:nvSpPr>
